--- a/red_analysis/BM55_Relaxation_Benchmark.pptx
+++ b/red_analysis/BM55_Relaxation_Benchmark.pptx
@@ -5944,7 +5944,7 @@
               </a:defRPr>
             </a:pPr>
             <a:r>
-              <a:t>Rosetta TM-score: 110 targets (45K+ rows)</a:t>
+              <a:t>Rosetta TM-score: 257 targets (45K+ rows)</a:t>
             </a:r>
           </a:p>
           <a:p>
@@ -5956,7 +5956,7 @@
               </a:defRPr>
             </a:pPr>
             <a:r>
-              <a:t>Rosetta MolProbity: 155 targets (56K+ rows)</a:t>
+              <a:t>Rosetta MolProbity: 160 targets (56K+ rows)</a:t>
             </a:r>
           </a:p>
           <a:p>

--- a/red_analysis/BM55_Relaxation_Benchmark.pptx
+++ b/red_analysis/BM55_Relaxation_Benchmark.pptx
@@ -5956,7 +5956,7 @@
               </a:defRPr>
             </a:pPr>
             <a:r>
-              <a:t>Rosetta MolProbity: 160 targets (56K+ rows)</a:t>
+              <a:t>Rosetta MolProbity: 179 targets (56K+ rows)</a:t>
             </a:r>
           </a:p>
           <a:p>

--- a/red_analysis/BM55_Relaxation_Benchmark.pptx
+++ b/red_analysis/BM55_Relaxation_Benchmark.pptx
@@ -5956,7 +5956,7 @@
               </a:defRPr>
             </a:pPr>
             <a:r>
-              <a:t>Rosetta MolProbity: 179 targets (56K+ rows)</a:t>
+              <a:t>Rosetta MolProbity: 204 targets (56K+ rows)</a:t>
             </a:r>
           </a:p>
           <a:p>

--- a/red_analysis/BM55_Relaxation_Benchmark.pptx
+++ b/red_analysis/BM55_Relaxation_Benchmark.pptx
@@ -5956,7 +5956,7 @@
               </a:defRPr>
             </a:pPr>
             <a:r>
-              <a:t>Rosetta MolProbity: 204 targets (56K+ rows)</a:t>
+              <a:t>Rosetta MolProbity: 257 targets (56K+ rows)</a:t>
             </a:r>
           </a:p>
           <a:p>
